--- a/1150704臨床教學中的拋與接-報到簽退問卷QRcode.pptx
+++ b/1150704臨床教學中的拋與接-報到簽退問卷QRcode.pptx
@@ -8,9 +8,10 @@
     <p:sldId id="256" r:id="rId2"/>
     <p:sldId id="257" r:id="rId3"/>
     <p:sldId id="258" r:id="rId4"/>
+    <p:sldId id="259" r:id="rId5"/>
   </p:sldIdLst>
   <p:notesMasterIdLst>
-    <p:notesMasterId r:id="rId5"/>
+    <p:notesMasterId r:id="rId6"/>
   </p:notesMasterIdLst>
   <p:sldSz cx="12191695" cy="6858000"/>
   <p:notesSz cx="6858000" cy="12191695"/>
@@ -704,6 +705,94 @@
             <a:fld id="{F7021451-1387-4CA6-816F-3879F97B5CBC}" type="slidenum">
               <a:rPr lang="en-US"/>
               <a:t>3</a:t>
+            </a:fld>
+            <a:endParaRPr lang="en-US"/>
+          </a:p>
+        </p:txBody>
+      </p:sp>
+    </p:spTree>
+    <p:extLst>
+      <p:ext uri="{BB962C8B-B14F-4D97-AF65-F5344CB8AC3E}">
+        <p14:creationId xmlns:p14="http://schemas.microsoft.com/office/powerpoint/2010/main" val="1024086991"/>
+      </p:ext>
+    </p:extLst>
+  </p:cSld>
+  <p:clrMapOvr>
+    <a:masterClrMapping/>
+  </p:clrMapOvr>
+</p:notes>
+</file>
+
+<file path=ppt/notesSlides/notesSlide4.xml><?xml version="1.0" encoding="utf-8"?>
+<p:notes xmlns:a="http://schemas.openxmlformats.org/drawingml/2006/main" xmlns:r="http://schemas.openxmlformats.org/officeDocument/2006/relationships" xmlns:p="http://schemas.openxmlformats.org/presentationml/2006/main">
+  <p:cSld>
+    <p:spTree>
+      <p:nvGrpSpPr>
+        <p:cNvPr id="1" name=""/>
+        <p:cNvGrpSpPr/>
+        <p:nvPr/>
+      </p:nvGrpSpPr>
+      <p:grpSpPr>
+        <a:xfrm>
+          <a:off x="0" y="0"/>
+          <a:ext cx="0" cy="0"/>
+          <a:chOff x="0" y="0"/>
+          <a:chExt cx="0" cy="0"/>
+        </a:xfrm>
+      </p:grpSpPr>
+      <p:sp>
+        <p:nvSpPr>
+          <p:cNvPr id="2" name="Slide Image Placeholder 1"/>
+          <p:cNvSpPr>
+            <a:spLocks noGrp="1" noRot="1" noChangeAspect="1"/>
+          </p:cNvSpPr>
+          <p:nvPr>
+            <p:ph type="sldImg"/>
+          </p:nvPr>
+        </p:nvSpPr>
+        <p:spPr/>
+      </p:sp>
+      <p:sp>
+        <p:nvSpPr>
+          <p:cNvPr id="3" name="Notes Placeholder 2"/>
+          <p:cNvSpPr>
+            <a:spLocks noGrp="1"/>
+          </p:cNvSpPr>
+          <p:nvPr>
+            <p:ph type="body" idx="1"/>
+          </p:nvPr>
+        </p:nvSpPr>
+        <p:spPr/>
+        <p:txBody>
+          <a:bodyPr/>
+          <a:lstStyle/>
+          <a:p>
+            <a:r>
+              <a:rPr lang="en-US" dirty="0"/>
+              <a:t/>
+            </a:r>
+            <a:endParaRPr lang="en-US" dirty="0"/>
+          </a:p>
+        </p:txBody>
+      </p:sp>
+      <p:sp>
+        <p:nvSpPr>
+          <p:cNvPr id="4" name="Slide Number Placeholder 3"/>
+          <p:cNvSpPr>
+            <a:spLocks noGrp="1"/>
+          </p:cNvSpPr>
+          <p:nvPr>
+            <p:ph type="sldNum" sz="quarter" idx="10"/>
+          </p:nvPr>
+        </p:nvSpPr>
+        <p:spPr/>
+        <p:txBody>
+          <a:bodyPr/>
+          <a:lstStyle/>
+          <a:p>
+            <a:fld id="{F7021451-1387-4CA6-816F-3879F97B5CBC}" type="slidenum">
+              <a:rPr lang="en-US"/>
+              <a:t>4</a:t>
             </a:fld>
             <a:endParaRPr lang="en-US"/>
           </a:p>
@@ -2988,6 +3077,633 @@
 </p:sld>
 </file>
 
+<file path=ppt/slides/slide4.xml><?xml version="1.0" encoding="utf-8"?>
+<p:sld xmlns:a="http://schemas.openxmlformats.org/drawingml/2006/main" xmlns:r="http://schemas.openxmlformats.org/officeDocument/2006/relationships" xmlns:p="http://schemas.openxmlformats.org/presentationml/2006/main">
+  <p:cSld name="Slide 4">
+    <p:bg>
+      <p:bgPr>
+        <a:solidFill>
+          <a:srgbClr val="FFFFFF"/>
+        </a:solidFill>
+      </p:bgPr>
+    </p:bg>
+    <p:spTree>
+      <p:nvGrpSpPr>
+        <p:cNvPr id="1" name=""/>
+        <p:cNvGrpSpPr/>
+        <p:nvPr/>
+      </p:nvGrpSpPr>
+      <p:grpSpPr>
+        <a:xfrm>
+          <a:off x="0" y="0"/>
+          <a:ext cx="0" cy="0"/>
+          <a:chOff x="0" y="0"/>
+          <a:chExt cx="0" cy="0"/>
+        </a:xfrm>
+      </p:grpSpPr>
+      <p:sp>
+        <p:nvSpPr>
+          <p:cNvPr id="2" name="Shape 0"/>
+          <p:cNvSpPr/>
+          <p:nvPr/>
+        </p:nvSpPr>
+        <p:spPr>
+          <a:xfrm>
+            <a:off x="9144000" y="-1554480"/>
+            <a:ext cx="4389120" cy="4389120"/>
+          </a:xfrm>
+          <a:prstGeom prst="ellipse">
+            <a:avLst/>
+          </a:prstGeom>
+          <a:solidFill>
+            <a:srgbClr val="DCEEFB"/>
+          </a:solidFill>
+          <a:ln/>
+        </p:spPr>
+      </p:sp>
+      <p:sp>
+        <p:nvSpPr>
+          <p:cNvPr id="3" name="Shape 1"/>
+          <p:cNvSpPr/>
+          <p:nvPr/>
+        </p:nvSpPr>
+        <p:spPr>
+          <a:xfrm>
+            <a:off x="-1463040" y="4754880"/>
+            <a:ext cx="3931920" cy="3931920"/>
+          </a:xfrm>
+          <a:prstGeom prst="ellipse">
+            <a:avLst/>
+          </a:prstGeom>
+          <a:solidFill>
+            <a:srgbClr val="FCEFC2"/>
+          </a:solidFill>
+          <a:ln/>
+        </p:spPr>
+      </p:sp>
+      <p:sp>
+        <p:nvSpPr>
+          <p:cNvPr id="4" name="Text 2"/>
+          <p:cNvSpPr/>
+          <p:nvPr/>
+        </p:nvSpPr>
+        <p:spPr>
+          <a:xfrm>
+            <a:off x="640080" y="457200"/>
+            <a:ext cx="6766560" cy="365760"/>
+          </a:xfrm>
+          <a:prstGeom prst="rect">
+            <a:avLst/>
+          </a:prstGeom>
+          <a:noFill/>
+          <a:ln/>
+        </p:spPr>
+        <p:txBody>
+          <a:bodyPr wrap="square" rtlCol="0" anchor="ctr"/>
+          <a:lstStyle/>
+          <a:p>
+            <a:pPr algn="l" indent="0" marL="0">
+              <a:buNone/>
+            </a:pPr>
+            <a:r>
+              <a:rPr lang="en-US" sz="1300" dirty="0">
+                <a:solidFill>
+                  <a:srgbClr val="5B7A85"/>
+                </a:solidFill>
+                <a:latin typeface="Microsoft JhengHei" pitchFamily="34" charset="0"/>
+                <a:ea typeface="Microsoft JhengHei" pitchFamily="34" charset="-122"/>
+                <a:cs typeface="Microsoft JhengHei" pitchFamily="34" charset="-120"/>
+              </a:rPr>
+              <a:t>奇美醫療財團法人奇美醫院 · 教學部</a:t>
+            </a:r>
+            <a:endParaRPr lang="en-US" sz="1300" dirty="0"/>
+          </a:p>
+        </p:txBody>
+      </p:sp>
+      <p:sp>
+        <p:nvSpPr>
+          <p:cNvPr id="5" name="Text 3"/>
+          <p:cNvSpPr/>
+          <p:nvPr/>
+        </p:nvSpPr>
+        <p:spPr>
+          <a:xfrm>
+            <a:off x="621792" y="822960"/>
+            <a:ext cx="6949440" cy="914400"/>
+          </a:xfrm>
+          <a:prstGeom prst="rect">
+            <a:avLst/>
+          </a:prstGeom>
+          <a:noFill/>
+          <a:ln/>
+        </p:spPr>
+        <p:txBody>
+          <a:bodyPr wrap="square" rtlCol="0" anchor="ctr"/>
+          <a:lstStyle/>
+          <a:p>
+            <a:pPr algn="l" indent="0" marL="0">
+              <a:buNone/>
+            </a:pPr>
+            <a:r>
+              <a:rPr lang="en-US" sz="4000" b="1" dirty="0">
+                <a:solidFill>
+                  <a:srgbClr val="14456B"/>
+                </a:solidFill>
+                <a:latin typeface="Microsoft JhengHei" pitchFamily="34" charset="0"/>
+                <a:ea typeface="Microsoft JhengHei" pitchFamily="34" charset="-122"/>
+                <a:cs typeface="Microsoft JhengHei" pitchFamily="34" charset="-120"/>
+              </a:rPr>
+              <a:t>臨床教學中的拋與接</a:t>
+            </a:r>
+            <a:endParaRPr lang="en-US" sz="4000" dirty="0"/>
+          </a:p>
+        </p:txBody>
+      </p:sp>
+      <p:sp>
+        <p:nvSpPr>
+          <p:cNvPr id="6" name="Text 4"/>
+          <p:cNvSpPr/>
+          <p:nvPr/>
+        </p:nvSpPr>
+        <p:spPr>
+          <a:xfrm>
+            <a:off x="640080" y="1737360"/>
+            <a:ext cx="6949440" cy="457200"/>
+          </a:xfrm>
+          <a:prstGeom prst="rect">
+            <a:avLst/>
+          </a:prstGeom>
+          <a:noFill/>
+          <a:ln/>
+        </p:spPr>
+        <p:txBody>
+          <a:bodyPr wrap="square" rtlCol="0" anchor="ctr"/>
+          <a:lstStyle/>
+          <a:p>
+            <a:pPr algn="l" indent="0" marL="0">
+              <a:buNone/>
+            </a:pPr>
+            <a:r>
+              <a:rPr lang="en-US" sz="1800" dirty="0">
+                <a:solidFill>
+                  <a:srgbClr val="1E6FB8"/>
+                </a:solidFill>
+                <a:latin typeface="Microsoft JhengHei" pitchFamily="34" charset="0"/>
+                <a:ea typeface="Microsoft JhengHei" pitchFamily="34" charset="-122"/>
+                <a:cs typeface="Microsoft JhengHei" pitchFamily="34" charset="-120"/>
+              </a:rPr>
+              <a:t>教學溝通的心理安全感與回饋技巧工作坊</a:t>
+            </a:r>
+            <a:endParaRPr lang="en-US" sz="1800" dirty="0"/>
+          </a:p>
+        </p:txBody>
+      </p:sp>
+      <p:sp>
+        <p:nvSpPr>
+          <p:cNvPr id="7" name="Text 5"/>
+          <p:cNvSpPr/>
+          <p:nvPr/>
+        </p:nvSpPr>
+        <p:spPr>
+          <a:xfrm>
+            <a:off x="640080" y="2514600"/>
+            <a:ext cx="4754880" cy="731520"/>
+          </a:xfrm>
+          <a:prstGeom prst="roundRect">
+            <a:avLst>
+              <a:gd name="adj" fmla="val 17500"/>
+            </a:avLst>
+          </a:prstGeom>
+          <a:solidFill>
+            <a:srgbClr val="1E6FB8"/>
+          </a:solidFill>
+          <a:ln/>
+        </p:spPr>
+        <p:txBody>
+          <a:bodyPr wrap="square" rtlCol="0" anchor="ctr"/>
+          <a:lstStyle/>
+          <a:p>
+            <a:pPr algn="ctr" indent="0" marL="0">
+              <a:buNone/>
+            </a:pPr>
+            <a:r>
+              <a:rPr lang="en-US" sz="2400" b="1" dirty="0">
+                <a:solidFill>
+                  <a:srgbClr val="FFFFFF"/>
+                </a:solidFill>
+                <a:latin typeface="Microsoft JhengHei" pitchFamily="34" charset="0"/>
+                <a:ea typeface="Microsoft JhengHei" pitchFamily="34" charset="-122"/>
+                <a:cs typeface="Microsoft JhengHei" pitchFamily="34" charset="-120"/>
+              </a:rPr>
+              <a:t>報到系統</a:t>
+            </a:r>
+            <a:endParaRPr lang="en-US" sz="2400" dirty="0"/>
+          </a:p>
+        </p:txBody>
+      </p:sp>
+      <p:sp>
+        <p:nvSpPr>
+          <p:cNvPr id="8" name="Text 6"/>
+          <p:cNvSpPr/>
+          <p:nvPr/>
+        </p:nvSpPr>
+        <p:spPr>
+          <a:xfrm>
+            <a:off x="658368" y="3383280"/>
+            <a:ext cx="6583680" cy="457200"/>
+          </a:xfrm>
+          <a:prstGeom prst="rect">
+            <a:avLst/>
+          </a:prstGeom>
+          <a:noFill/>
+          <a:ln/>
+        </p:spPr>
+        <p:txBody>
+          <a:bodyPr wrap="square" rtlCol="0" anchor="ctr"/>
+          <a:lstStyle/>
+          <a:p>
+            <a:pPr algn="l" indent="0" marL="0">
+              <a:buNone/>
+            </a:pPr>
+            <a:r>
+              <a:rPr lang="en-US" sz="1600" dirty="0">
+                <a:solidFill>
+                  <a:srgbClr val="13456B"/>
+                </a:solidFill>
+                <a:latin typeface="Microsoft JhengHei" pitchFamily="34" charset="0"/>
+                <a:ea typeface="Microsoft JhengHei" pitchFamily="34" charset="-122"/>
+                <a:cs typeface="Microsoft JhengHei" pitchFamily="34" charset="-120"/>
+              </a:rPr>
+              <a:t>現場報到</a:t>
+            </a:r>
+            <a:endParaRPr lang="en-US" sz="1600" dirty="0"/>
+          </a:p>
+        </p:txBody>
+      </p:sp>
+      <p:sp>
+        <p:nvSpPr>
+          <p:cNvPr id="9" name="Text 7"/>
+          <p:cNvSpPr/>
+          <p:nvPr/>
+        </p:nvSpPr>
+        <p:spPr>
+          <a:xfrm>
+            <a:off x="640080" y="4023360"/>
+            <a:ext cx="6675120" cy="457200"/>
+          </a:xfrm>
+          <a:prstGeom prst="rect">
+            <a:avLst/>
+          </a:prstGeom>
+          <a:noFill/>
+          <a:ln/>
+        </p:spPr>
+        <p:txBody>
+          <a:bodyPr wrap="square" rtlCol="0" anchor="ctr"/>
+          <a:lstStyle/>
+          <a:p>
+            <a:pPr algn="l" indent="0" marL="0">
+              <a:buNone/>
+            </a:pPr>
+            <a:r>
+              <a:rPr lang="en-US" sz="1600" b="1" dirty="0">
+                <a:solidFill>
+                  <a:srgbClr val="14456B"/>
+                </a:solidFill>
+                <a:latin typeface="Microsoft JhengHei" pitchFamily="34" charset="0"/>
+                <a:ea typeface="Microsoft JhengHei" pitchFamily="34" charset="-122"/>
+                <a:cs typeface="Microsoft JhengHei" pitchFamily="34" charset="-120"/>
+              </a:rPr>
+              <a:t>掃描右側 QR Code </a:t>
+            </a:r>
+            <a:pPr algn="l" indent="0" marL="0">
+              <a:buNone/>
+            </a:pPr>
+            <a:r>
+              <a:rPr lang="en-US" sz="1600" dirty="0">
+                <a:solidFill>
+                  <a:srgbClr val="13456B"/>
+                </a:solidFill>
+                <a:latin typeface="Microsoft JhengHei" pitchFamily="34" charset="0"/>
+                <a:ea typeface="Microsoft JhengHei" pitchFamily="34" charset="-122"/>
+                <a:cs typeface="Microsoft JhengHei" pitchFamily="34" charset="-120"/>
+              </a:rPr>
+              <a:t>或於瀏覽器輸入下方網址進入</a:t>
+            </a:r>
+            <a:endParaRPr lang="en-US" sz="1600" dirty="0"/>
+          </a:p>
+        </p:txBody>
+      </p:sp>
+      <p:sp>
+        <p:nvSpPr>
+          <p:cNvPr id="10" name="Text 8"/>
+          <p:cNvSpPr/>
+          <p:nvPr/>
+        </p:nvSpPr>
+        <p:spPr>
+          <a:xfrm>
+            <a:off x="640080" y="5212080"/>
+            <a:ext cx="6766560" cy="1005840"/>
+          </a:xfrm>
+          <a:prstGeom prst="rect">
+            <a:avLst/>
+          </a:prstGeom>
+          <a:noFill/>
+          <a:ln/>
+        </p:spPr>
+        <p:txBody>
+          <a:bodyPr wrap="square" rtlCol="0" anchor="ctr"/>
+          <a:lstStyle/>
+          <a:p>
+            <a:pPr algn="l" indent="0" marL="0">
+              <a:lnSpc>
+                <a:spcPct val="125000"/>
+              </a:lnSpc>
+              <a:buNone/>
+            </a:pPr>
+            <a:r>
+              <a:rPr lang="en-US" sz="1500" b="1" dirty="0">
+                <a:solidFill>
+                  <a:srgbClr val="13456B"/>
+                </a:solidFill>
+                <a:latin typeface="Microsoft JhengHei" pitchFamily="34" charset="0"/>
+                <a:ea typeface="Microsoft JhengHei" pitchFamily="34" charset="-122"/>
+                <a:cs typeface="Microsoft JhengHei" pitchFamily="34" charset="-120"/>
+              </a:rPr>
+              <a:t>日期：</a:t>
+            </a:r>
+            <a:pPr algn="l" indent="0" marL="0">
+              <a:lnSpc>
+                <a:spcPct val="125000"/>
+              </a:lnSpc>
+              <a:buNone/>
+            </a:pPr>
+            <a:r>
+              <a:rPr lang="en-US" sz="1500" dirty="0">
+                <a:solidFill>
+                  <a:srgbClr val="13456B"/>
+                </a:solidFill>
+                <a:latin typeface="Microsoft JhengHei" pitchFamily="34" charset="0"/>
+                <a:ea typeface="Microsoft JhengHei" pitchFamily="34" charset="-122"/>
+                <a:cs typeface="Microsoft JhengHei" pitchFamily="34" charset="-120"/>
+              </a:rPr>
+              <a:t>115年7月4日（六）    </a:t>
+            </a:r>
+            <a:pPr algn="l" indent="0" marL="0">
+              <a:lnSpc>
+                <a:spcPct val="125000"/>
+              </a:lnSpc>
+              <a:buNone/>
+            </a:pPr>
+            <a:r>
+              <a:rPr lang="en-US" sz="1500" b="1" dirty="0">
+                <a:solidFill>
+                  <a:srgbClr val="13456B"/>
+                </a:solidFill>
+                <a:latin typeface="Microsoft JhengHei" pitchFamily="34" charset="0"/>
+                <a:ea typeface="Microsoft JhengHei" pitchFamily="34" charset="-122"/>
+                <a:cs typeface="Microsoft JhengHei" pitchFamily="34" charset="-120"/>
+              </a:rPr>
+              <a:t>時間：</a:t>
+            </a:r>
+            <a:pPr algn="l" indent="0" marL="0">
+              <a:lnSpc>
+                <a:spcPct val="125000"/>
+              </a:lnSpc>
+              <a:buNone/>
+            </a:pPr>
+            <a:r>
+              <a:rPr lang="en-US" sz="1500" dirty="0">
+                <a:solidFill>
+                  <a:srgbClr val="13456B"/>
+                </a:solidFill>
+                <a:latin typeface="Microsoft JhengHei" pitchFamily="34" charset="0"/>
+                <a:ea typeface="Microsoft JhengHei" pitchFamily="34" charset="-122"/>
+                <a:cs typeface="Microsoft JhengHei" pitchFamily="34" charset="-120"/>
+              </a:rPr>
+              <a:t>12:50 ~ 16:15（12:30 開始報到）
+</a:t>
+            </a:r>
+            <a:pPr algn="l" indent="0" marL="0">
+              <a:lnSpc>
+                <a:spcPct val="125000"/>
+              </a:lnSpc>
+              <a:buNone/>
+            </a:pPr>
+            <a:r>
+              <a:rPr lang="en-US" sz="1500" b="1" dirty="0">
+                <a:solidFill>
+                  <a:srgbClr val="13456B"/>
+                </a:solidFill>
+                <a:latin typeface="Microsoft JhengHei" pitchFamily="34" charset="0"/>
+                <a:ea typeface="Microsoft JhengHei" pitchFamily="34" charset="-122"/>
+                <a:cs typeface="Microsoft JhengHei" pitchFamily="34" charset="-120"/>
+              </a:rPr>
+              <a:t>地點：</a:t>
+            </a:r>
+            <a:pPr algn="l" indent="0" marL="0">
+              <a:lnSpc>
+                <a:spcPct val="125000"/>
+              </a:lnSpc>
+              <a:buNone/>
+            </a:pPr>
+            <a:r>
+              <a:rPr lang="en-US" sz="1500" dirty="0">
+                <a:solidFill>
+                  <a:srgbClr val="13456B"/>
+                </a:solidFill>
+                <a:latin typeface="Microsoft JhengHei" pitchFamily="34" charset="0"/>
+                <a:ea typeface="Microsoft JhengHei" pitchFamily="34" charset="-122"/>
+                <a:cs typeface="Microsoft JhengHei" pitchFamily="34" charset="-120"/>
+              </a:rPr>
+              <a:t>第三醫療大樓 331、332 會議室</a:t>
+            </a:r>
+            <a:endParaRPr lang="en-US" sz="1500" dirty="0"/>
+          </a:p>
+        </p:txBody>
+      </p:sp>
+      <p:sp>
+        <p:nvSpPr>
+          <p:cNvPr id="11" name="Shape 9"/>
+          <p:cNvSpPr/>
+          <p:nvPr/>
+        </p:nvSpPr>
+        <p:spPr>
+          <a:xfrm>
+            <a:off x="7726680" y="1143000"/>
+            <a:ext cx="3977640" cy="5074920"/>
+          </a:xfrm>
+          <a:prstGeom prst="roundRect">
+            <a:avLst>
+              <a:gd name="adj" fmla="val 2759"/>
+            </a:avLst>
+          </a:prstGeom>
+          <a:solidFill>
+            <a:srgbClr val="FFFFFF"/>
+          </a:solidFill>
+          <a:ln w="12700">
+            <a:solidFill>
+              <a:srgbClr val="E4EDF3"/>
+            </a:solidFill>
+            <a:prstDash val="solid"/>
+          </a:ln>
+          <a:effectLst>
+            <a:outerShdw sx="100000" sy="100000" kx="0" ky="0" algn="bl" rotWithShape="0" blurRad="127000" dist="38100" dir="5400000">
+              <a:srgbClr val="9BB4C4">
+                <a:alpha val="45000"/>
+              </a:srgbClr>
+            </a:outerShdw>
+          </a:effectLst>
+        </p:spPr>
+      </p:sp>
+      <p:sp>
+        <p:nvSpPr>
+          <p:cNvPr id="12" name="Text 10"/>
+          <p:cNvSpPr/>
+          <p:nvPr/>
+        </p:nvSpPr>
+        <p:spPr>
+          <a:xfrm>
+            <a:off x="7726680" y="1325880"/>
+            <a:ext cx="3977640" cy="365760"/>
+          </a:xfrm>
+          <a:prstGeom prst="rect">
+            <a:avLst/>
+          </a:prstGeom>
+          <a:noFill/>
+          <a:ln/>
+        </p:spPr>
+        <p:txBody>
+          <a:bodyPr wrap="square" rtlCol="0" anchor="ctr"/>
+          <a:lstStyle/>
+          <a:p>
+            <a:pPr algn="ctr" indent="0" marL="0">
+              <a:buNone/>
+            </a:pPr>
+            <a:r>
+              <a:rPr lang="en-US" sz="1500" b="1" dirty="0">
+                <a:solidFill>
+                  <a:srgbClr val="1E6FB8"/>
+                </a:solidFill>
+                <a:latin typeface="Microsoft JhengHei" pitchFamily="34" charset="0"/>
+                <a:ea typeface="Microsoft JhengHei" pitchFamily="34" charset="-122"/>
+                <a:cs typeface="Microsoft JhengHei" pitchFamily="34" charset="-120"/>
+              </a:rPr>
+              <a:t>掃一掃　立即進入</a:t>
+            </a:r>
+            <a:endParaRPr lang="en-US" sz="1500" dirty="0"/>
+          </a:p>
+        </p:txBody>
+      </p:sp>
+      <p:pic>
+        <p:nvPicPr>
+          <p:cNvPr id="13" name="Image 0" descr="C:\Users\linme\AppData\Local\Temp\claude\C--Users-linme-Desktop-Claude-Projects-ClinicalTeacher-FeedbackWorkshop\05b7ddd5-a2ec-499f-8bb2-2b9221f2b2e0\scratchpad\qrppt\qr4.png">    </p:cNvPr>
+          <p:cNvPicPr>
+            <a:picLocks noChangeAspect="1"/>
+          </p:cNvPicPr>
+          <p:nvPr/>
+        </p:nvPicPr>
+        <p:blipFill>
+          <a:blip r:embed="rId1"/>
+          <a:stretch>
+            <a:fillRect/>
+          </a:stretch>
+        </p:blipFill>
+        <p:spPr>
+          <a:xfrm>
+            <a:off x="8069580" y="1783080"/>
+            <a:ext cx="3291840" cy="3291840"/>
+          </a:xfrm>
+          <a:prstGeom prst="rect">
+            <a:avLst/>
+          </a:prstGeom>
+        </p:spPr>
+      </p:pic>
+      <p:sp>
+        <p:nvSpPr>
+          <p:cNvPr id="14" name="Text 11"/>
+          <p:cNvSpPr/>
+          <p:nvPr/>
+        </p:nvSpPr>
+        <p:spPr>
+          <a:xfrm>
+            <a:off x="7863840" y="5212080"/>
+            <a:ext cx="3703320" cy="868680"/>
+          </a:xfrm>
+          <a:prstGeom prst="rect">
+            <a:avLst/>
+          </a:prstGeom>
+          <a:noFill/>
+          <a:ln/>
+        </p:spPr>
+        <p:txBody>
+          <a:bodyPr wrap="square" rtlCol="0" anchor="t"/>
+          <a:lstStyle/>
+          <a:p>
+            <a:pPr algn="ctr" indent="0" marL="0">
+              <a:buNone/>
+            </a:pPr>
+            <a:r>
+              <a:rPr lang="en-US" sz="1050" dirty="0">
+                <a:solidFill>
+                  <a:srgbClr val="13456B"/>
+                </a:solidFill>
+                <a:latin typeface="Consolas" pitchFamily="34" charset="0"/>
+                <a:ea typeface="Consolas" pitchFamily="34" charset="-122"/>
+                <a:cs typeface="Consolas" pitchFamily="34" charset="-120"/>
+              </a:rPr>
+              <a:t>https://linmenggann.github.io/ClinicalTeacher-FeedbackWorkshop/checkin.html?mode=checkin</a:t>
+            </a:r>
+            <a:endParaRPr lang="en-US" sz="1050" dirty="0"/>
+          </a:p>
+        </p:txBody>
+      </p:sp>
+      <p:sp>
+        <p:nvSpPr>
+          <p:cNvPr id="15" name="Text 12"/>
+          <p:cNvSpPr/>
+          <p:nvPr/>
+        </p:nvSpPr>
+        <p:spPr>
+          <a:xfrm>
+            <a:off x="640080" y="6355080"/>
+            <a:ext cx="6949440" cy="365760"/>
+          </a:xfrm>
+          <a:prstGeom prst="rect">
+            <a:avLst/>
+          </a:prstGeom>
+          <a:noFill/>
+          <a:ln/>
+        </p:spPr>
+        <p:txBody>
+          <a:bodyPr wrap="square" rtlCol="0" anchor="ctr"/>
+          <a:lstStyle/>
+          <a:p>
+            <a:pPr algn="l" indent="0" marL="0">
+              <a:buNone/>
+            </a:pPr>
+            <a:r>
+              <a:rPr lang="en-US" sz="1200" dirty="0">
+                <a:solidFill>
+                  <a:srgbClr val="5B7A85"/>
+                </a:solidFill>
+                <a:latin typeface="Microsoft JhengHei" pitchFamily="34" charset="0"/>
+                <a:ea typeface="Microsoft JhengHei" pitchFamily="34" charset="-122"/>
+                <a:cs typeface="Microsoft JhengHei" pitchFamily="34" charset="-120"/>
+              </a:rPr>
+              <a:t>聯絡：教學部 陳詩芸　06-281-2811 分機 57439</a:t>
+            </a:r>
+            <a:endParaRPr lang="en-US" sz="1200" dirty="0"/>
+          </a:p>
+        </p:txBody>
+      </p:sp>
+    </p:spTree>
+  </p:cSld>
+  <p:clrMapOvr>
+    <a:masterClrMapping/>
+  </p:clrMapOvr>
+</p:sld>
+</file>
+
 <file path=ppt/theme/theme1.xml><?xml version="1.0" encoding="utf-8"?>
 <a:theme xmlns:a="http://schemas.openxmlformats.org/drawingml/2006/main" name="Office Theme">
   <a:themeElements>

--- a/1150704臨床教學中的拋與接-報到簽退問卷QRcode.pptx
+++ b/1150704臨床教學中的拋與接-報到簽退問卷QRcode.pptx
@@ -1982,7 +1982,7 @@
             </a:avLst>
           </a:prstGeom>
           <a:solidFill>
-            <a:srgbClr val="14456B"/>
+            <a:srgbClr val="1E6FB8"/>
           </a:solidFill>
           <a:ln/>
         </p:spPr>
@@ -2002,7 +2002,7 @@
                 <a:ea typeface="Microsoft JhengHei" pitchFamily="34" charset="-122"/>
                 <a:cs typeface="Microsoft JhengHei" pitchFamily="34" charset="-120"/>
               </a:rPr>
-              <a:t>簽退系統</a:t>
+              <a:t>報到系統</a:t>
             </a:r>
             <a:endParaRPr lang="en-US" sz="2400" dirty="0"/>
           </a:p>
@@ -2041,7 +2041,7 @@
                 <a:ea typeface="Microsoft JhengHei" pitchFamily="34" charset="-122"/>
                 <a:cs typeface="Microsoft JhengHei" pitchFamily="34" charset="-120"/>
               </a:rPr>
-              <a:t>課程結束後簽退</a:t>
+              <a:t>現場報到</a:t>
             </a:r>
             <a:endParaRPr lang="en-US" sz="1600" dirty="0"/>
           </a:p>
@@ -2289,7 +2289,7 @@
             <a:r>
               <a:rPr lang="en-US" sz="1500" b="1" dirty="0">
                 <a:solidFill>
-                  <a:srgbClr val="14456B"/>
+                  <a:srgbClr val="1E6FB8"/>
                 </a:solidFill>
                 <a:latin typeface="Microsoft JhengHei" pitchFamily="34" charset="0"/>
                 <a:ea typeface="Microsoft JhengHei" pitchFamily="34" charset="-122"/>
@@ -2303,7 +2303,7 @@
       </p:sp>
       <p:pic>
         <p:nvPicPr>
-          <p:cNvPr id="13" name="Image 0" descr="C:\Users\linme\AppData\Local\Temp\claude\C--Users-linme-Desktop-Claude-Projects-ClinicalTeacher-FeedbackWorkshop\05b7ddd5-a2ec-499f-8bb2-2b9221f2b2e0\scratchpad\qrppt\qr2.png">    </p:cNvPr>
+          <p:cNvPr id="13" name="Image 0" descr="C:\Users\linme\AppData\Local\Temp\claude\C--Users-linme-Desktop-Claude-Projects-ClinicalTeacher-FeedbackWorkshop\05b7ddd5-a2ec-499f-8bb2-2b9221f2b2e0\scratchpad\qrppt\qr4.png">    </p:cNvPr>
           <p:cNvPicPr>
             <a:picLocks noChangeAspect="1"/>
           </p:cNvPicPr>
@@ -2358,7 +2358,7 @@
                 <a:ea typeface="Consolas" pitchFamily="34" charset="-122"/>
                 <a:cs typeface="Consolas" pitchFamily="34" charset="-120"/>
               </a:rPr>
-              <a:t>https://linmenggann.github.io/ClinicalTeacher-FeedbackWorkshop/checkin.html?mode=checkout</a:t>
+              <a:t>https://linmenggann.github.io/ClinicalTeacher-FeedbackWorkshop/checkin.html?mode=checkin</a:t>
             </a:r>
             <a:endParaRPr lang="en-US" sz="1050" dirty="0"/>
           </a:p>
@@ -2609,7 +2609,7 @@
             </a:avLst>
           </a:prstGeom>
           <a:solidFill>
-            <a:srgbClr val="F5C400"/>
+            <a:srgbClr val="14456B"/>
           </a:solidFill>
           <a:ln/>
         </p:spPr>
@@ -2623,13 +2623,13 @@
             <a:r>
               <a:rPr lang="en-US" sz="2400" b="1" dirty="0">
                 <a:solidFill>
-                  <a:srgbClr val="5A4500"/>
-                </a:solidFill>
-                <a:latin typeface="Microsoft JhengHei" pitchFamily="34" charset="0"/>
-                <a:ea typeface="Microsoft JhengHei" pitchFamily="34" charset="-122"/>
-                <a:cs typeface="Microsoft JhengHei" pitchFamily="34" charset="-120"/>
-              </a:rPr>
-              <a:t>課程滿意度問卷</a:t>
+                  <a:srgbClr val="FFFFFF"/>
+                </a:solidFill>
+                <a:latin typeface="Microsoft JhengHei" pitchFamily="34" charset="0"/>
+                <a:ea typeface="Microsoft JhengHei" pitchFamily="34" charset="-122"/>
+                <a:cs typeface="Microsoft JhengHei" pitchFamily="34" charset="-120"/>
+              </a:rPr>
+              <a:t>簽退系統</a:t>
             </a:r>
             <a:endParaRPr lang="en-US" sz="2400" dirty="0"/>
           </a:p>
@@ -2668,7 +2668,7 @@
                 <a:ea typeface="Microsoft JhengHei" pitchFamily="34" charset="-122"/>
                 <a:cs typeface="Microsoft JhengHei" pitchFamily="34" charset="-120"/>
               </a:rPr>
-              <a:t>課後回饋調查（約 1 分鐘）</a:t>
+              <a:t>課程結束後簽退</a:t>
             </a:r>
             <a:endParaRPr lang="en-US" sz="1600" dirty="0"/>
           </a:p>
@@ -2730,45 +2730,6 @@
       <p:sp>
         <p:nvSpPr>
           <p:cNvPr id="10" name="Text 8"/>
-          <p:cNvSpPr/>
-          <p:nvPr/>
-        </p:nvSpPr>
-        <p:spPr>
-          <a:xfrm>
-            <a:off x="640080" y="4526280"/>
-            <a:ext cx="6675120" cy="365760"/>
-          </a:xfrm>
-          <a:prstGeom prst="rect">
-            <a:avLst/>
-          </a:prstGeom>
-          <a:noFill/>
-          <a:ln/>
-        </p:spPr>
-        <p:txBody>
-          <a:bodyPr wrap="square" rtlCol="0" anchor="ctr"/>
-          <a:lstStyle/>
-          <a:p>
-            <a:pPr algn="l" indent="0" marL="0">
-              <a:buNone/>
-            </a:pPr>
-            <a:r>
-              <a:rPr lang="en-US" sz="1300" i="1" dirty="0">
-                <a:solidFill>
-                  <a:srgbClr val="5B7A85"/>
-                </a:solidFill>
-                <a:latin typeface="Microsoft JhengHei" pitchFamily="34" charset="0"/>
-                <a:ea typeface="Microsoft JhengHei" pitchFamily="34" charset="-122"/>
-                <a:cs typeface="Microsoft JhengHei" pitchFamily="34" charset="-120"/>
-              </a:rPr>
-              <a:t>※ 敬請協助填寫，作為課程精進參考</a:t>
-            </a:r>
-            <a:endParaRPr lang="en-US" sz="1300" dirty="0"/>
-          </a:p>
-        </p:txBody>
-      </p:sp>
-      <p:sp>
-        <p:nvSpPr>
-          <p:cNvPr id="11" name="Text 9"/>
           <p:cNvSpPr/>
           <p:nvPr/>
         </p:nvSpPr>
@@ -2896,7 +2857,7 @@
       </p:sp>
       <p:sp>
         <p:nvSpPr>
-          <p:cNvPr id="12" name="Shape 10"/>
+          <p:cNvPr id="11" name="Shape 9"/>
           <p:cNvSpPr/>
           <p:nvPr/>
         </p:nvSpPr>
@@ -2930,7 +2891,7 @@
       </p:sp>
       <p:sp>
         <p:nvSpPr>
-          <p:cNvPr id="13" name="Text 11"/>
+          <p:cNvPr id="12" name="Text 10"/>
           <p:cNvSpPr/>
           <p:nvPr/>
         </p:nvSpPr>
@@ -2955,7 +2916,7 @@
             <a:r>
               <a:rPr lang="en-US" sz="1500" b="1" dirty="0">
                 <a:solidFill>
-                  <a:srgbClr val="E0A800"/>
+                  <a:srgbClr val="14456B"/>
                 </a:solidFill>
                 <a:latin typeface="Microsoft JhengHei" pitchFamily="34" charset="0"/>
                 <a:ea typeface="Microsoft JhengHei" pitchFamily="34" charset="-122"/>
@@ -2969,7 +2930,7 @@
       </p:sp>
       <p:pic>
         <p:nvPicPr>
-          <p:cNvPr id="14" name="Image 0" descr="C:\Users\linme\AppData\Local\Temp\claude\C--Users-linme-Desktop-Claude-Projects-ClinicalTeacher-FeedbackWorkshop\05b7ddd5-a2ec-499f-8bb2-2b9221f2b2e0\scratchpad\qrppt\qr3.png">    </p:cNvPr>
+          <p:cNvPr id="13" name="Image 0" descr="C:\Users\linme\AppData\Local\Temp\claude\C--Users-linme-Desktop-Claude-Projects-ClinicalTeacher-FeedbackWorkshop\05b7ddd5-a2ec-499f-8bb2-2b9221f2b2e0\scratchpad\qrppt\qr2.png">    </p:cNvPr>
           <p:cNvPicPr>
             <a:picLocks noChangeAspect="1"/>
           </p:cNvPicPr>
@@ -2993,7 +2954,7 @@
       </p:pic>
       <p:sp>
         <p:nvSpPr>
-          <p:cNvPr id="15" name="Text 12"/>
+          <p:cNvPr id="14" name="Text 11"/>
           <p:cNvSpPr/>
           <p:nvPr/>
         </p:nvSpPr>
@@ -3024,7 +2985,7 @@
                 <a:ea typeface="Consolas" pitchFamily="34" charset="-122"/>
                 <a:cs typeface="Consolas" pitchFamily="34" charset="-120"/>
               </a:rPr>
-              <a:t>https://linmenggann.github.io/ClinicalTeacher-FeedbackWorkshop/survey</a:t>
+              <a:t>https://linmenggann.github.io/ClinicalTeacher-FeedbackWorkshop/checkin.html?mode=checkout</a:t>
             </a:r>
             <a:endParaRPr lang="en-US" sz="1050" dirty="0"/>
           </a:p>
@@ -3032,7 +2993,7 @@
       </p:sp>
       <p:sp>
         <p:nvSpPr>
-          <p:cNvPr id="16" name="Text 13"/>
+          <p:cNvPr id="15" name="Text 12"/>
           <p:cNvSpPr/>
           <p:nvPr/>
         </p:nvSpPr>
@@ -3275,7 +3236,7 @@
             </a:avLst>
           </a:prstGeom>
           <a:solidFill>
-            <a:srgbClr val="1E6FB8"/>
+            <a:srgbClr val="F5C400"/>
           </a:solidFill>
           <a:ln/>
         </p:spPr>
@@ -3289,13 +3250,13 @@
             <a:r>
               <a:rPr lang="en-US" sz="2400" b="1" dirty="0">
                 <a:solidFill>
-                  <a:srgbClr val="FFFFFF"/>
-                </a:solidFill>
-                <a:latin typeface="Microsoft JhengHei" pitchFamily="34" charset="0"/>
-                <a:ea typeface="Microsoft JhengHei" pitchFamily="34" charset="-122"/>
-                <a:cs typeface="Microsoft JhengHei" pitchFamily="34" charset="-120"/>
-              </a:rPr>
-              <a:t>報到系統</a:t>
+                  <a:srgbClr val="5A4500"/>
+                </a:solidFill>
+                <a:latin typeface="Microsoft JhengHei" pitchFamily="34" charset="0"/>
+                <a:ea typeface="Microsoft JhengHei" pitchFamily="34" charset="-122"/>
+                <a:cs typeface="Microsoft JhengHei" pitchFamily="34" charset="-120"/>
+              </a:rPr>
+              <a:t>課程滿意度問卷</a:t>
             </a:r>
             <a:endParaRPr lang="en-US" sz="2400" dirty="0"/>
           </a:p>
@@ -3334,7 +3295,7 @@
                 <a:ea typeface="Microsoft JhengHei" pitchFamily="34" charset="-122"/>
                 <a:cs typeface="Microsoft JhengHei" pitchFamily="34" charset="-120"/>
               </a:rPr>
-              <a:t>現場報到</a:t>
+              <a:t>課後回饋調查（約 1 分鐘）</a:t>
             </a:r>
             <a:endParaRPr lang="en-US" sz="1600" dirty="0"/>
           </a:p>
@@ -3396,6 +3357,45 @@
       <p:sp>
         <p:nvSpPr>
           <p:cNvPr id="10" name="Text 8"/>
+          <p:cNvSpPr/>
+          <p:nvPr/>
+        </p:nvSpPr>
+        <p:spPr>
+          <a:xfrm>
+            <a:off x="640080" y="4526280"/>
+            <a:ext cx="6675120" cy="365760"/>
+          </a:xfrm>
+          <a:prstGeom prst="rect">
+            <a:avLst/>
+          </a:prstGeom>
+          <a:noFill/>
+          <a:ln/>
+        </p:spPr>
+        <p:txBody>
+          <a:bodyPr wrap="square" rtlCol="0" anchor="ctr"/>
+          <a:lstStyle/>
+          <a:p>
+            <a:pPr algn="l" indent="0" marL="0">
+              <a:buNone/>
+            </a:pPr>
+            <a:r>
+              <a:rPr lang="en-US" sz="1300" i="1" dirty="0">
+                <a:solidFill>
+                  <a:srgbClr val="5B7A85"/>
+                </a:solidFill>
+                <a:latin typeface="Microsoft JhengHei" pitchFamily="34" charset="0"/>
+                <a:ea typeface="Microsoft JhengHei" pitchFamily="34" charset="-122"/>
+                <a:cs typeface="Microsoft JhengHei" pitchFamily="34" charset="-120"/>
+              </a:rPr>
+              <a:t>※ 敬請協助填寫，作為課程精進參考</a:t>
+            </a:r>
+            <a:endParaRPr lang="en-US" sz="1300" dirty="0"/>
+          </a:p>
+        </p:txBody>
+      </p:sp>
+      <p:sp>
+        <p:nvSpPr>
+          <p:cNvPr id="11" name="Text 9"/>
           <p:cNvSpPr/>
           <p:nvPr/>
         </p:nvSpPr>
@@ -3523,7 +3523,7 @@
       </p:sp>
       <p:sp>
         <p:nvSpPr>
-          <p:cNvPr id="11" name="Shape 9"/>
+          <p:cNvPr id="12" name="Shape 10"/>
           <p:cNvSpPr/>
           <p:nvPr/>
         </p:nvSpPr>
@@ -3557,7 +3557,7 @@
       </p:sp>
       <p:sp>
         <p:nvSpPr>
-          <p:cNvPr id="12" name="Text 10"/>
+          <p:cNvPr id="13" name="Text 11"/>
           <p:cNvSpPr/>
           <p:nvPr/>
         </p:nvSpPr>
@@ -3582,7 +3582,7 @@
             <a:r>
               <a:rPr lang="en-US" sz="1500" b="1" dirty="0">
                 <a:solidFill>
-                  <a:srgbClr val="1E6FB8"/>
+                  <a:srgbClr val="E0A800"/>
                 </a:solidFill>
                 <a:latin typeface="Microsoft JhengHei" pitchFamily="34" charset="0"/>
                 <a:ea typeface="Microsoft JhengHei" pitchFamily="34" charset="-122"/>
@@ -3596,7 +3596,7 @@
       </p:sp>
       <p:pic>
         <p:nvPicPr>
-          <p:cNvPr id="13" name="Image 0" descr="C:\Users\linme\AppData\Local\Temp\claude\C--Users-linme-Desktop-Claude-Projects-ClinicalTeacher-FeedbackWorkshop\05b7ddd5-a2ec-499f-8bb2-2b9221f2b2e0\scratchpad\qrppt\qr4.png">    </p:cNvPr>
+          <p:cNvPr id="14" name="Image 0" descr="C:\Users\linme\AppData\Local\Temp\claude\C--Users-linme-Desktop-Claude-Projects-ClinicalTeacher-FeedbackWorkshop\05b7ddd5-a2ec-499f-8bb2-2b9221f2b2e0\scratchpad\qrppt\qr3.png">    </p:cNvPr>
           <p:cNvPicPr>
             <a:picLocks noChangeAspect="1"/>
           </p:cNvPicPr>
@@ -3620,7 +3620,7 @@
       </p:pic>
       <p:sp>
         <p:nvSpPr>
-          <p:cNvPr id="14" name="Text 11"/>
+          <p:cNvPr id="15" name="Text 12"/>
           <p:cNvSpPr/>
           <p:nvPr/>
         </p:nvSpPr>
@@ -3651,7 +3651,7 @@
                 <a:ea typeface="Consolas" pitchFamily="34" charset="-122"/>
                 <a:cs typeface="Consolas" pitchFamily="34" charset="-120"/>
               </a:rPr>
-              <a:t>https://linmenggann.github.io/ClinicalTeacher-FeedbackWorkshop/checkin.html?mode=checkin</a:t>
+              <a:t>https://linmenggann.github.io/ClinicalTeacher-FeedbackWorkshop/survey</a:t>
             </a:r>
             <a:endParaRPr lang="en-US" sz="1050" dirty="0"/>
           </a:p>
@@ -3659,7 +3659,7 @@
       </p:sp>
       <p:sp>
         <p:nvSpPr>
-          <p:cNvPr id="15" name="Text 12"/>
+          <p:cNvPr id="16" name="Text 13"/>
           <p:cNvSpPr/>
           <p:nvPr/>
         </p:nvSpPr>
